--- a/LLMs-101-v2.pptx
+++ b/LLMs-101-v2.pptx
@@ -5,7 +5,7 @@
     <p:sldMasterId id="2147483648" r:id="rId1"/>
   </p:sldMasterIdLst>
   <p:notesMasterIdLst>
-    <p:notesMasterId r:id="rId29"/>
+    <p:notesMasterId r:id="rId28"/>
   </p:notesMasterIdLst>
   <p:sldIdLst>
     <p:sldId id="256" r:id="rId2"/>
@@ -32,9 +32,8 @@
     <p:sldId id="277" r:id="rId23"/>
     <p:sldId id="278" r:id="rId24"/>
     <p:sldId id="279" r:id="rId25"/>
-    <p:sldId id="280" r:id="rId26"/>
-    <p:sldId id="281" r:id="rId27"/>
-    <p:sldId id="282" r:id="rId28"/>
+    <p:sldId id="281" r:id="rId26"/>
+    <p:sldId id="282" r:id="rId27"/>
   </p:sldIdLst>
   <p:sldSz cx="12192000" cy="6858000"/>
   <p:notesSz cx="6858000" cy="12192000"/>
@@ -1788,7 +1787,7 @@
           <a:p>
             <a:r>
               <a:rPr lang="en-US" dirty="0"/>
-              <a:t>Customize this slide with your own institution's policy names and the actual contact for security review before you present. K-State Libraries GPT is approved for sensitive data — say so explicitly, because it's the tool they just installed. Licensed content still applies to it. The last line is the most important one — the goal is to make asking early feel normal rather than like admitting you did something wrong.</a:t>
+              <a:t>Read question six aloud slowly. It's the one that separates a personal-laptop decision from an institutional one, and it's where librarians' existing instincts about patron records do all the work for you.</a:t>
             </a:r>
           </a:p>
         </p:txBody>
@@ -1875,7 +1874,7 @@
           <a:p>
             <a:r>
               <a:rPr lang="en-US" dirty="0"/>
-              <a:t>Read question six aloud slowly. It's the one that separates a personal-laptop decision from an institutional one, and it's where librarians' existing instincts about patron records do all the work for you.</a:t>
+              <a:t>Close by asking each person to name one task they'll try this week. Saying it out loud roughly doubles the odds they do it. Offer a follow-up session in a month for people to show what they built — that's where the real adoption happens.</a:t>
             </a:r>
           </a:p>
         </p:txBody>
@@ -1898,93 +1897,6 @@
             <a:fld id="{F7021451-1387-4CA6-816F-3879F97B5CBC}" type="slidenum">
               <a:rPr lang="en-US"/>
               <a:t>26</a:t>
-            </a:fld>
-            <a:endParaRPr lang="en-US"/>
-          </a:p>
-        </p:txBody>
-      </p:sp>
-    </p:spTree>
-    <p:extLst>
-      <p:ext uri="{BB962C8B-B14F-4D97-AF65-F5344CB8AC3E}">
-        <p14:creationId xmlns:p14="http://schemas.microsoft.com/office/powerpoint/2010/main" val="1024086991"/>
-      </p:ext>
-    </p:extLst>
-  </p:cSld>
-  <p:clrMapOvr>
-    <a:masterClrMapping/>
-  </p:clrMapOvr>
-</p:notes>
-</file>
-
-<file path=ppt/notesSlides/notesSlide27.xml><?xml version="1.0" encoding="utf-8"?>
-<p:notes xmlns:a="http://schemas.openxmlformats.org/drawingml/2006/main" xmlns:r="http://schemas.openxmlformats.org/officeDocument/2006/relationships" xmlns:p="http://schemas.openxmlformats.org/presentationml/2006/main">
-  <p:cSld>
-    <p:spTree>
-      <p:nvGrpSpPr>
-        <p:cNvPr id="1" name=""/>
-        <p:cNvGrpSpPr/>
-        <p:nvPr/>
-      </p:nvGrpSpPr>
-      <p:grpSpPr>
-        <a:xfrm>
-          <a:off x="0" y="0"/>
-          <a:ext cx="0" cy="0"/>
-          <a:chOff x="0" y="0"/>
-          <a:chExt cx="0" cy="0"/>
-        </a:xfrm>
-      </p:grpSpPr>
-      <p:sp>
-        <p:nvSpPr>
-          <p:cNvPr id="2" name="Slide Image Placeholder 1"/>
-          <p:cNvSpPr>
-            <a:spLocks noGrp="1" noRot="1" noChangeAspect="1"/>
-          </p:cNvSpPr>
-          <p:nvPr>
-            <p:ph type="sldImg"/>
-          </p:nvPr>
-        </p:nvSpPr>
-        <p:spPr/>
-      </p:sp>
-      <p:sp>
-        <p:nvSpPr>
-          <p:cNvPr id="3" name="Notes Placeholder 2"/>
-          <p:cNvSpPr>
-            <a:spLocks noGrp="1"/>
-          </p:cNvSpPr>
-          <p:nvPr>
-            <p:ph type="body" idx="1"/>
-          </p:nvPr>
-        </p:nvSpPr>
-        <p:spPr/>
-        <p:txBody>
-          <a:bodyPr/>
-          <a:lstStyle/>
-          <a:p>
-            <a:r>
-              <a:rPr lang="en-US" dirty="0"/>
-              <a:t>Close by asking each person to name one task they'll try this week. Saying it out loud roughly doubles the odds they do it. Offer a follow-up session in a month for people to show what they built — that's where the real adoption happens.</a:t>
-            </a:r>
-          </a:p>
-        </p:txBody>
-      </p:sp>
-      <p:sp>
-        <p:nvSpPr>
-          <p:cNvPr id="4" name="Slide Number Placeholder 3"/>
-          <p:cNvSpPr>
-            <a:spLocks noGrp="1"/>
-          </p:cNvSpPr>
-          <p:nvPr>
-            <p:ph type="sldNum" sz="quarter" idx="10"/>
-          </p:nvPr>
-        </p:nvSpPr>
-        <p:spPr/>
-        <p:txBody>
-          <a:bodyPr/>
-          <a:lstStyle/>
-          <a:p>
-            <a:fld id="{F7021451-1387-4CA6-816F-3879F97B5CBC}" type="slidenum">
-              <a:rPr lang="en-US"/>
-              <a:t>27</a:t>
             </a:fld>
             <a:endParaRPr lang="en-US"/>
           </a:p>
@@ -10657,7 +10569,7 @@
           <p:nvPr/>
         </p:nvPicPr>
         <p:blipFill>
-          <a:blip r:embed="rIdQr"/>
+          <a:blip r:embed="rId3"/>
           <a:stretch>
             <a:fillRect/>
           </a:stretch>
@@ -17053,870 +16965,6 @@
 
 <file path=ppt/slides/slide25.xml><?xml version="1.0" encoding="utf-8"?>
 <p:sld xmlns:a="http://schemas.openxmlformats.org/drawingml/2006/main" xmlns:r="http://schemas.openxmlformats.org/officeDocument/2006/relationships" xmlns:p="http://schemas.openxmlformats.org/presentationml/2006/main">
-  <p:cSld name="Slide 25">
-    <p:bg>
-      <p:bgPr>
-        <a:solidFill>
-          <a:srgbClr val="512888"/>
-        </a:solidFill>
-        <a:effectLst/>
-      </p:bgPr>
-    </p:bg>
-    <p:spTree>
-      <p:nvGrpSpPr>
-        <p:cNvPr id="1" name=""/>
-        <p:cNvGrpSpPr/>
-        <p:nvPr/>
-      </p:nvGrpSpPr>
-      <p:grpSpPr>
-        <a:xfrm>
-          <a:off x="0" y="0"/>
-          <a:ext cx="0" cy="0"/>
-          <a:chOff x="0" y="0"/>
-          <a:chExt cx="0" cy="0"/>
-        </a:xfrm>
-      </p:grpSpPr>
-      <p:sp>
-        <p:nvSpPr>
-          <p:cNvPr id="2" name="Text 0"/>
-          <p:cNvSpPr/>
-          <p:nvPr/>
-        </p:nvSpPr>
-        <p:spPr>
-          <a:xfrm>
-            <a:off x="594360" y="310896"/>
-            <a:ext cx="10058400" cy="274320"/>
-          </a:xfrm>
-          <a:prstGeom prst="rect">
-            <a:avLst/>
-          </a:prstGeom>
-          <a:noFill/>
-          <a:ln/>
-        </p:spPr>
-        <p:txBody>
-          <a:bodyPr wrap="square" lIns="0" tIns="0" rIns="0" bIns="0" rtlCol="0" anchor="ctr"/>
-          <a:lstStyle/>
-          <a:p>
-            <a:pPr marL="0" indent="0">
-              <a:buNone/>
-            </a:pPr>
-            <a:r>
-              <a:rPr lang="en-US" sz="1100" b="1" kern="0" spc="220" dirty="0">
-                <a:solidFill>
-                  <a:srgbClr val="FFC845"/>
-                </a:solidFill>
-                <a:latin typeface="Calibri" pitchFamily="34" charset="0"/>
-                <a:ea typeface="Calibri" pitchFamily="34" charset="-122"/>
-                <a:cs typeface="Calibri" pitchFamily="34" charset="-120"/>
-              </a:rPr>
-              <a:t>FOR US SPECIFICALLY</a:t>
-            </a:r>
-            <a:endParaRPr lang="en-US" sz="1100" dirty="0"/>
-          </a:p>
-        </p:txBody>
-      </p:sp>
-      <p:sp>
-        <p:nvSpPr>
-          <p:cNvPr id="3" name="Text 1"/>
-          <p:cNvSpPr/>
-          <p:nvPr/>
-        </p:nvSpPr>
-        <p:spPr>
-          <a:xfrm>
-            <a:off x="594360" y="603504"/>
-            <a:ext cx="10607040" cy="685800"/>
-          </a:xfrm>
-          <a:prstGeom prst="rect">
-            <a:avLst/>
-          </a:prstGeom>
-          <a:noFill/>
-          <a:ln/>
-        </p:spPr>
-        <p:txBody>
-          <a:bodyPr wrap="square" lIns="0" tIns="0" rIns="0" bIns="0" rtlCol="0" anchor="t"/>
-          <a:lstStyle/>
-          <a:p>
-            <a:pPr marL="0" indent="0">
-              <a:buNone/>
-            </a:pPr>
-            <a:r>
-              <a:rPr lang="en-US" sz="3000" b="1" dirty="0">
-                <a:solidFill>
-                  <a:srgbClr val="FFFFFF"/>
-                </a:solidFill>
-                <a:latin typeface="Cambria" pitchFamily="34" charset="0"/>
-                <a:ea typeface="Cambria" pitchFamily="34" charset="-122"/>
-                <a:cs typeface="Cambria" pitchFamily="34" charset="-120"/>
-              </a:rPr>
-              <a:t>Where a library gets into trouble faster than most</a:t>
-            </a:r>
-            <a:endParaRPr lang="en-US" sz="3000" dirty="0"/>
-          </a:p>
-        </p:txBody>
-      </p:sp>
-      <p:sp>
-        <p:nvSpPr>
-          <p:cNvPr id="4" name="Shape 2"/>
-          <p:cNvSpPr/>
-          <p:nvPr/>
-        </p:nvSpPr>
-        <p:spPr>
-          <a:xfrm>
-            <a:off x="594360" y="1481328"/>
-            <a:ext cx="10972800" cy="731520"/>
-          </a:xfrm>
-          <a:prstGeom prst="roundRect">
-            <a:avLst>
-              <a:gd name="adj" fmla="val 10870"/>
-            </a:avLst>
-          </a:prstGeom>
-          <a:solidFill>
-            <a:srgbClr val="3D1E66"/>
-          </a:solidFill>
-          <a:ln/>
-        </p:spPr>
-        <p:txBody>
-          <a:bodyPr/>
-          <a:lstStyle/>
-          <a:p>
-            <a:endParaRPr lang="en-US"/>
-          </a:p>
-        </p:txBody>
-      </p:sp>
-      <p:sp>
-        <p:nvSpPr>
-          <p:cNvPr id="5" name="Shape 3"/>
-          <p:cNvSpPr/>
-          <p:nvPr/>
-        </p:nvSpPr>
-        <p:spPr>
-          <a:xfrm>
-            <a:off x="960120" y="1764792"/>
-            <a:ext cx="164592" cy="164592"/>
-          </a:xfrm>
-          <a:prstGeom prst="ellipse">
-            <a:avLst/>
-          </a:prstGeom>
-          <a:solidFill>
-            <a:srgbClr val="FF7A6B"/>
-          </a:solidFill>
-          <a:ln/>
-        </p:spPr>
-        <p:txBody>
-          <a:bodyPr/>
-          <a:lstStyle/>
-          <a:p>
-            <a:endParaRPr lang="en-US"/>
-          </a:p>
-        </p:txBody>
-      </p:sp>
-      <p:sp>
-        <p:nvSpPr>
-          <p:cNvPr id="6" name="Text 4"/>
-          <p:cNvSpPr/>
-          <p:nvPr/>
-        </p:nvSpPr>
-        <p:spPr>
-          <a:xfrm>
-            <a:off x="1307592" y="1481328"/>
-            <a:ext cx="2468880" cy="731520"/>
-          </a:xfrm>
-          <a:prstGeom prst="rect">
-            <a:avLst/>
-          </a:prstGeom>
-          <a:noFill/>
-          <a:ln/>
-        </p:spPr>
-        <p:txBody>
-          <a:bodyPr wrap="square" lIns="0" tIns="0" rIns="0" bIns="0" rtlCol="0" anchor="ctr"/>
-          <a:lstStyle/>
-          <a:p>
-            <a:pPr marL="0" indent="0">
-              <a:buNone/>
-            </a:pPr>
-            <a:r>
-              <a:rPr lang="en-US" sz="1600" b="1" dirty="0">
-                <a:solidFill>
-                  <a:srgbClr val="FFC845"/>
-                </a:solidFill>
-                <a:latin typeface="Calibri" pitchFamily="34" charset="0"/>
-                <a:ea typeface="Calibri" pitchFamily="34" charset="-122"/>
-                <a:cs typeface="Calibri" pitchFamily="34" charset="-120"/>
-              </a:rPr>
-              <a:t>Patron privacy</a:t>
-            </a:r>
-            <a:endParaRPr lang="en-US" sz="1600" dirty="0"/>
-          </a:p>
-        </p:txBody>
-      </p:sp>
-      <p:sp>
-        <p:nvSpPr>
-          <p:cNvPr id="7" name="Text 5"/>
-          <p:cNvSpPr/>
-          <p:nvPr/>
-        </p:nvSpPr>
-        <p:spPr>
-          <a:xfrm>
-            <a:off x="3794760" y="1481328"/>
-            <a:ext cx="7498080" cy="731520"/>
-          </a:xfrm>
-          <a:prstGeom prst="rect">
-            <a:avLst/>
-          </a:prstGeom>
-          <a:noFill/>
-          <a:ln/>
-        </p:spPr>
-        <p:txBody>
-          <a:bodyPr wrap="square" lIns="0" tIns="0" rIns="0" bIns="0" rtlCol="0" anchor="ctr"/>
-          <a:lstStyle/>
-          <a:p>
-            <a:pPr marL="0" indent="0">
-              <a:lnSpc>
-                <a:spcPts val="1800"/>
-              </a:lnSpc>
-              <a:buNone/>
-            </a:pPr>
-            <a:r>
-              <a:rPr lang="en-US" sz="1300" dirty="0">
-                <a:solidFill>
-                  <a:srgbClr val="D1D1D1"/>
-                </a:solidFill>
-                <a:latin typeface="Calibri" pitchFamily="34" charset="0"/>
-                <a:ea typeface="Calibri" pitchFamily="34" charset="-122"/>
-                <a:cs typeface="Calibri" pitchFamily="34" charset="-120"/>
-              </a:rPr>
-              <a:t>Circulation and reference records are protected by state law in most states and by our own ethics before that. They stay on K-State Libraries GPT or a local model — never a commercial cloud tool.</a:t>
-            </a:r>
-            <a:endParaRPr lang="en-US" sz="1300" dirty="0"/>
-          </a:p>
-        </p:txBody>
-      </p:sp>
-      <p:sp>
-        <p:nvSpPr>
-          <p:cNvPr id="8" name="Shape 6"/>
-          <p:cNvSpPr/>
-          <p:nvPr/>
-        </p:nvSpPr>
-        <p:spPr>
-          <a:xfrm>
-            <a:off x="594360" y="2286000"/>
-            <a:ext cx="10972800" cy="731520"/>
-          </a:xfrm>
-          <a:prstGeom prst="roundRect">
-            <a:avLst>
-              <a:gd name="adj" fmla="val 10870"/>
-            </a:avLst>
-          </a:prstGeom>
-          <a:solidFill>
-            <a:srgbClr val="3D1E66"/>
-          </a:solidFill>
-          <a:ln/>
-        </p:spPr>
-        <p:txBody>
-          <a:bodyPr/>
-          <a:lstStyle/>
-          <a:p>
-            <a:endParaRPr lang="en-US"/>
-          </a:p>
-        </p:txBody>
-      </p:sp>
-      <p:sp>
-        <p:nvSpPr>
-          <p:cNvPr id="9" name="Shape 7"/>
-          <p:cNvSpPr/>
-          <p:nvPr/>
-        </p:nvSpPr>
-        <p:spPr>
-          <a:xfrm>
-            <a:off x="960120" y="2569464"/>
-            <a:ext cx="164592" cy="164592"/>
-          </a:xfrm>
-          <a:prstGeom prst="ellipse">
-            <a:avLst/>
-          </a:prstGeom>
-          <a:solidFill>
-            <a:srgbClr val="FF7A6B"/>
-          </a:solidFill>
-          <a:ln/>
-        </p:spPr>
-        <p:txBody>
-          <a:bodyPr/>
-          <a:lstStyle/>
-          <a:p>
-            <a:endParaRPr lang="en-US"/>
-          </a:p>
-        </p:txBody>
-      </p:sp>
-      <p:sp>
-        <p:nvSpPr>
-          <p:cNvPr id="10" name="Text 8"/>
-          <p:cNvSpPr/>
-          <p:nvPr/>
-        </p:nvSpPr>
-        <p:spPr>
-          <a:xfrm>
-            <a:off x="1307592" y="2286000"/>
-            <a:ext cx="2468880" cy="731520"/>
-          </a:xfrm>
-          <a:prstGeom prst="rect">
-            <a:avLst/>
-          </a:prstGeom>
-          <a:noFill/>
-          <a:ln/>
-        </p:spPr>
-        <p:txBody>
-          <a:bodyPr wrap="square" lIns="0" tIns="0" rIns="0" bIns="0" rtlCol="0" anchor="ctr"/>
-          <a:lstStyle/>
-          <a:p>
-            <a:pPr marL="0" indent="0">
-              <a:buNone/>
-            </a:pPr>
-            <a:r>
-              <a:rPr lang="en-US" sz="1600" b="1" dirty="0">
-                <a:solidFill>
-                  <a:srgbClr val="FFC845"/>
-                </a:solidFill>
-                <a:latin typeface="Calibri" pitchFamily="34" charset="0"/>
-                <a:ea typeface="Calibri" pitchFamily="34" charset="-122"/>
-                <a:cs typeface="Calibri" pitchFamily="34" charset="-120"/>
-              </a:rPr>
-              <a:t>FERPA</a:t>
-            </a:r>
-            <a:endParaRPr lang="en-US" sz="1600" dirty="0"/>
-          </a:p>
-        </p:txBody>
-      </p:sp>
-      <p:sp>
-        <p:nvSpPr>
-          <p:cNvPr id="11" name="Text 9"/>
-          <p:cNvSpPr/>
-          <p:nvPr/>
-        </p:nvSpPr>
-        <p:spPr>
-          <a:xfrm>
-            <a:off x="3794760" y="2286000"/>
-            <a:ext cx="7498080" cy="731520"/>
-          </a:xfrm>
-          <a:prstGeom prst="rect">
-            <a:avLst/>
-          </a:prstGeom>
-          <a:noFill/>
-          <a:ln/>
-        </p:spPr>
-        <p:txBody>
-          <a:bodyPr wrap="square" lIns="0" tIns="0" rIns="0" bIns="0" rtlCol="0" anchor="ctr"/>
-          <a:lstStyle/>
-          <a:p>
-            <a:pPr marL="0" indent="0">
-              <a:lnSpc>
-                <a:spcPts val="1800"/>
-              </a:lnSpc>
-              <a:buNone/>
-            </a:pPr>
-            <a:r>
-              <a:rPr lang="en-US" sz="1300" dirty="0">
-                <a:solidFill>
-                  <a:srgbClr val="D1D1D1"/>
-                </a:solidFill>
-                <a:latin typeface="Calibri" pitchFamily="34" charset="0"/>
-                <a:ea typeface="Calibri" pitchFamily="34" charset="-122"/>
-                <a:cs typeface="Calibri" pitchFamily="34" charset="-120"/>
-              </a:rPr>
-              <a:t>Student work, grades, advising notes, anything identifiable. A commercial cloud API call is a disclosure. K-State Libraries GPT is approved; for any other tool, check with the registrar first.</a:t>
-            </a:r>
-            <a:endParaRPr lang="en-US" sz="1300" dirty="0"/>
-          </a:p>
-        </p:txBody>
-      </p:sp>
-      <p:sp>
-        <p:nvSpPr>
-          <p:cNvPr id="12" name="Shape 10"/>
-          <p:cNvSpPr/>
-          <p:nvPr/>
-        </p:nvSpPr>
-        <p:spPr>
-          <a:xfrm>
-            <a:off x="594360" y="3090672"/>
-            <a:ext cx="10972800" cy="731520"/>
-          </a:xfrm>
-          <a:prstGeom prst="roundRect">
-            <a:avLst>
-              <a:gd name="adj" fmla="val 10870"/>
-            </a:avLst>
-          </a:prstGeom>
-          <a:solidFill>
-            <a:srgbClr val="3D1E66"/>
-          </a:solidFill>
-          <a:ln/>
-        </p:spPr>
-        <p:txBody>
-          <a:bodyPr/>
-          <a:lstStyle/>
-          <a:p>
-            <a:endParaRPr lang="en-US"/>
-          </a:p>
-        </p:txBody>
-      </p:sp>
-      <p:sp>
-        <p:nvSpPr>
-          <p:cNvPr id="13" name="Shape 11"/>
-          <p:cNvSpPr/>
-          <p:nvPr/>
-        </p:nvSpPr>
-        <p:spPr>
-          <a:xfrm>
-            <a:off x="960120" y="3374136"/>
-            <a:ext cx="164592" cy="164592"/>
-          </a:xfrm>
-          <a:prstGeom prst="ellipse">
-            <a:avLst/>
-          </a:prstGeom>
-          <a:solidFill>
-            <a:srgbClr val="FF7A6B"/>
-          </a:solidFill>
-          <a:ln/>
-        </p:spPr>
-        <p:txBody>
-          <a:bodyPr/>
-          <a:lstStyle/>
-          <a:p>
-            <a:endParaRPr lang="en-US"/>
-          </a:p>
-        </p:txBody>
-      </p:sp>
-      <p:sp>
-        <p:nvSpPr>
-          <p:cNvPr id="14" name="Text 12"/>
-          <p:cNvSpPr/>
-          <p:nvPr/>
-        </p:nvSpPr>
-        <p:spPr>
-          <a:xfrm>
-            <a:off x="1307592" y="3090672"/>
-            <a:ext cx="2468880" cy="731520"/>
-          </a:xfrm>
-          <a:prstGeom prst="rect">
-            <a:avLst/>
-          </a:prstGeom>
-          <a:noFill/>
-          <a:ln/>
-        </p:spPr>
-        <p:txBody>
-          <a:bodyPr wrap="square" lIns="0" tIns="0" rIns="0" bIns="0" rtlCol="0" anchor="ctr"/>
-          <a:lstStyle/>
-          <a:p>
-            <a:pPr marL="0" indent="0">
-              <a:buNone/>
-            </a:pPr>
-            <a:r>
-              <a:rPr lang="en-US" sz="1600" b="1" dirty="0">
-                <a:solidFill>
-                  <a:srgbClr val="FFC845"/>
-                </a:solidFill>
-                <a:latin typeface="Calibri" pitchFamily="34" charset="0"/>
-                <a:ea typeface="Calibri" pitchFamily="34" charset="-122"/>
-                <a:cs typeface="Calibri" pitchFamily="34" charset="-120"/>
-              </a:rPr>
-              <a:t>Licensed content</a:t>
-            </a:r>
-            <a:endParaRPr lang="en-US" sz="1600" dirty="0"/>
-          </a:p>
-        </p:txBody>
-      </p:sp>
-      <p:sp>
-        <p:nvSpPr>
-          <p:cNvPr id="15" name="Text 13"/>
-          <p:cNvSpPr/>
-          <p:nvPr/>
-        </p:nvSpPr>
-        <p:spPr>
-          <a:xfrm>
-            <a:off x="3794760" y="3090672"/>
-            <a:ext cx="7498080" cy="731520"/>
-          </a:xfrm>
-          <a:prstGeom prst="rect">
-            <a:avLst/>
-          </a:prstGeom>
-          <a:noFill/>
-          <a:ln/>
-        </p:spPr>
-        <p:txBody>
-          <a:bodyPr wrap="square" lIns="0" tIns="0" rIns="0" bIns="0" rtlCol="0" anchor="ctr"/>
-          <a:lstStyle/>
-          <a:p>
-            <a:pPr marL="0" indent="0">
-              <a:lnSpc>
-                <a:spcPts val="1800"/>
-              </a:lnSpc>
-              <a:buNone/>
-            </a:pPr>
-            <a:r>
-              <a:rPr lang="en-US" sz="1300" dirty="0">
-                <a:solidFill>
-                  <a:srgbClr val="D1D1D1"/>
-                </a:solidFill>
-                <a:latin typeface="Calibri" pitchFamily="34" charset="0"/>
-                <a:ea typeface="Calibri" pitchFamily="34" charset="-122"/>
-                <a:cs typeface="Calibri" pitchFamily="34" charset="-120"/>
-              </a:rPr>
-              <a:t>Most database and ebook licenses prohibit bulk extraction and machine processing — on any tool, campus ones included. Pointing an agent at a downloaded corpus can breach the contract for the whole campus.</a:t>
-            </a:r>
-            <a:endParaRPr lang="en-US" sz="1300" dirty="0"/>
-          </a:p>
-        </p:txBody>
-      </p:sp>
-      <p:sp>
-        <p:nvSpPr>
-          <p:cNvPr id="16" name="Shape 14"/>
-          <p:cNvSpPr/>
-          <p:nvPr/>
-        </p:nvSpPr>
-        <p:spPr>
-          <a:xfrm>
-            <a:off x="594360" y="3895344"/>
-            <a:ext cx="10972800" cy="731520"/>
-          </a:xfrm>
-          <a:prstGeom prst="roundRect">
-            <a:avLst>
-              <a:gd name="adj" fmla="val 10870"/>
-            </a:avLst>
-          </a:prstGeom>
-          <a:solidFill>
-            <a:srgbClr val="3D1E66"/>
-          </a:solidFill>
-          <a:ln/>
-        </p:spPr>
-        <p:txBody>
-          <a:bodyPr/>
-          <a:lstStyle/>
-          <a:p>
-            <a:endParaRPr lang="en-US"/>
-          </a:p>
-        </p:txBody>
-      </p:sp>
-      <p:sp>
-        <p:nvSpPr>
-          <p:cNvPr id="17" name="Shape 15"/>
-          <p:cNvSpPr/>
-          <p:nvPr/>
-        </p:nvSpPr>
-        <p:spPr>
-          <a:xfrm>
-            <a:off x="960120" y="4178808"/>
-            <a:ext cx="164592" cy="164592"/>
-          </a:xfrm>
-          <a:prstGeom prst="ellipse">
-            <a:avLst/>
-          </a:prstGeom>
-          <a:solidFill>
-            <a:srgbClr val="FF7A6B"/>
-          </a:solidFill>
-          <a:ln/>
-        </p:spPr>
-        <p:txBody>
-          <a:bodyPr/>
-          <a:lstStyle/>
-          <a:p>
-            <a:endParaRPr lang="en-US"/>
-          </a:p>
-        </p:txBody>
-      </p:sp>
-      <p:sp>
-        <p:nvSpPr>
-          <p:cNvPr id="18" name="Text 16"/>
-          <p:cNvSpPr/>
-          <p:nvPr/>
-        </p:nvSpPr>
-        <p:spPr>
-          <a:xfrm>
-            <a:off x="1307592" y="3895344"/>
-            <a:ext cx="2468880" cy="731520"/>
-          </a:xfrm>
-          <a:prstGeom prst="rect">
-            <a:avLst/>
-          </a:prstGeom>
-          <a:noFill/>
-          <a:ln/>
-        </p:spPr>
-        <p:txBody>
-          <a:bodyPr wrap="square" lIns="0" tIns="0" rIns="0" bIns="0" rtlCol="0" anchor="ctr"/>
-          <a:lstStyle/>
-          <a:p>
-            <a:pPr marL="0" indent="0">
-              <a:buNone/>
-            </a:pPr>
-            <a:r>
-              <a:rPr lang="en-US" sz="1600" b="1" dirty="0">
-                <a:solidFill>
-                  <a:srgbClr val="FFC845"/>
-                </a:solidFill>
-                <a:latin typeface="Calibri" pitchFamily="34" charset="0"/>
-                <a:ea typeface="Calibri" pitchFamily="34" charset="-122"/>
-                <a:cs typeface="Calibri" pitchFamily="34" charset="-120"/>
-              </a:rPr>
-              <a:t>Credentials to systems</a:t>
-            </a:r>
-            <a:endParaRPr lang="en-US" sz="1600" dirty="0"/>
-          </a:p>
-        </p:txBody>
-      </p:sp>
-      <p:sp>
-        <p:nvSpPr>
-          <p:cNvPr id="19" name="Text 17"/>
-          <p:cNvSpPr/>
-          <p:nvPr/>
-        </p:nvSpPr>
-        <p:spPr>
-          <a:xfrm>
-            <a:off x="3794760" y="3895344"/>
-            <a:ext cx="7498080" cy="731520"/>
-          </a:xfrm>
-          <a:prstGeom prst="rect">
-            <a:avLst/>
-          </a:prstGeom>
-          <a:noFill/>
-          <a:ln/>
-        </p:spPr>
-        <p:txBody>
-          <a:bodyPr wrap="square" lIns="0" tIns="0" rIns="0" bIns="0" rtlCol="0" anchor="ctr"/>
-          <a:lstStyle/>
-          <a:p>
-            <a:pPr marL="0" indent="0">
-              <a:lnSpc>
-                <a:spcPts val="1800"/>
-              </a:lnSpc>
-              <a:buNone/>
-            </a:pPr>
-            <a:r>
-              <a:rPr lang="en-US" sz="1300" dirty="0">
-                <a:solidFill>
-                  <a:srgbClr val="D1D1D1"/>
-                </a:solidFill>
-                <a:latin typeface="Calibri" pitchFamily="34" charset="0"/>
-                <a:ea typeface="Calibri" pitchFamily="34" charset="-122"/>
-                <a:cs typeface="Calibri" pitchFamily="34" charset="-120"/>
-              </a:rPr>
-              <a:t>Never give an agent a live ILS, repository, or admin login while you're still learning what it does. Read-only first, on test data, always.</a:t>
-            </a:r>
-            <a:endParaRPr lang="en-US" sz="1300" dirty="0"/>
-          </a:p>
-        </p:txBody>
-      </p:sp>
-      <p:sp>
-        <p:nvSpPr>
-          <p:cNvPr id="20" name="Shape 18"/>
-          <p:cNvSpPr/>
-          <p:nvPr/>
-        </p:nvSpPr>
-        <p:spPr>
-          <a:xfrm>
-            <a:off x="594360" y="4700016"/>
-            <a:ext cx="10972800" cy="731520"/>
-          </a:xfrm>
-          <a:prstGeom prst="roundRect">
-            <a:avLst>
-              <a:gd name="adj" fmla="val 10870"/>
-            </a:avLst>
-          </a:prstGeom>
-          <a:solidFill>
-            <a:srgbClr val="3D1E66"/>
-          </a:solidFill>
-          <a:ln/>
-        </p:spPr>
-        <p:txBody>
-          <a:bodyPr/>
-          <a:lstStyle/>
-          <a:p>
-            <a:endParaRPr lang="en-US"/>
-          </a:p>
-        </p:txBody>
-      </p:sp>
-      <p:sp>
-        <p:nvSpPr>
-          <p:cNvPr id="21" name="Shape 19"/>
-          <p:cNvSpPr/>
-          <p:nvPr/>
-        </p:nvSpPr>
-        <p:spPr>
-          <a:xfrm>
-            <a:off x="960120" y="4983480"/>
-            <a:ext cx="164592" cy="164592"/>
-          </a:xfrm>
-          <a:prstGeom prst="ellipse">
-            <a:avLst/>
-          </a:prstGeom>
-          <a:solidFill>
-            <a:srgbClr val="FF7A6B"/>
-          </a:solidFill>
-          <a:ln/>
-        </p:spPr>
-        <p:txBody>
-          <a:bodyPr/>
-          <a:lstStyle/>
-          <a:p>
-            <a:endParaRPr lang="en-US"/>
-          </a:p>
-        </p:txBody>
-      </p:sp>
-      <p:sp>
-        <p:nvSpPr>
-          <p:cNvPr id="22" name="Text 20"/>
-          <p:cNvSpPr/>
-          <p:nvPr/>
-        </p:nvSpPr>
-        <p:spPr>
-          <a:xfrm>
-            <a:off x="1307592" y="4700016"/>
-            <a:ext cx="2468880" cy="731520"/>
-          </a:xfrm>
-          <a:prstGeom prst="rect">
-            <a:avLst/>
-          </a:prstGeom>
-          <a:noFill/>
-          <a:ln/>
-        </p:spPr>
-        <p:txBody>
-          <a:bodyPr wrap="square" lIns="0" tIns="0" rIns="0" bIns="0" rtlCol="0" anchor="ctr"/>
-          <a:lstStyle/>
-          <a:p>
-            <a:pPr marL="0" indent="0">
-              <a:buNone/>
-            </a:pPr>
-            <a:r>
-              <a:rPr lang="en-US" sz="1600" b="1" dirty="0">
-                <a:solidFill>
-                  <a:srgbClr val="FFC845"/>
-                </a:solidFill>
-                <a:latin typeface="Calibri" pitchFamily="34" charset="0"/>
-                <a:ea typeface="Calibri" pitchFamily="34" charset="-122"/>
-                <a:cs typeface="Calibri" pitchFamily="34" charset="-120"/>
-              </a:rPr>
-              <a:t>Institutional voice</a:t>
-            </a:r>
-            <a:endParaRPr lang="en-US" sz="1600" dirty="0"/>
-          </a:p>
-        </p:txBody>
-      </p:sp>
-      <p:sp>
-        <p:nvSpPr>
-          <p:cNvPr id="23" name="Text 21"/>
-          <p:cNvSpPr/>
-          <p:nvPr/>
-        </p:nvSpPr>
-        <p:spPr>
-          <a:xfrm>
-            <a:off x="3794760" y="4700016"/>
-            <a:ext cx="7498080" cy="731520"/>
-          </a:xfrm>
-          <a:prstGeom prst="rect">
-            <a:avLst/>
-          </a:prstGeom>
-          <a:noFill/>
-          <a:ln/>
-        </p:spPr>
-        <p:txBody>
-          <a:bodyPr wrap="square" lIns="0" tIns="0" rIns="0" bIns="0" rtlCol="0" anchor="ctr"/>
-          <a:lstStyle/>
-          <a:p>
-            <a:pPr marL="0" indent="0">
-              <a:lnSpc>
-                <a:spcPts val="1800"/>
-              </a:lnSpc>
-              <a:buNone/>
-            </a:pPr>
-            <a:r>
-              <a:rPr lang="en-US" sz="1300" dirty="0">
-                <a:solidFill>
-                  <a:srgbClr val="D1D1D1"/>
-                </a:solidFill>
-                <a:latin typeface="Calibri" pitchFamily="34" charset="0"/>
-                <a:ea typeface="Calibri" pitchFamily="34" charset="-122"/>
-                <a:cs typeface="Calibri" pitchFamily="34" charset="-120"/>
-              </a:rPr>
-              <a:t>AI-drafted text going out under the library's name still needs a human who read it and owns it. Say so in writing before it becomes a habit.</a:t>
-            </a:r>
-            <a:endParaRPr lang="en-US" sz="1300" dirty="0"/>
-          </a:p>
-        </p:txBody>
-      </p:sp>
-      <p:sp>
-        <p:nvSpPr>
-          <p:cNvPr id="24" name="Shape 22"/>
-          <p:cNvSpPr/>
-          <p:nvPr/>
-        </p:nvSpPr>
-        <p:spPr>
-          <a:xfrm>
-            <a:off x="594360" y="5577840"/>
-            <a:ext cx="10972800" cy="658368"/>
-          </a:xfrm>
-          <a:prstGeom prst="roundRect">
-            <a:avLst>
-              <a:gd name="adj" fmla="val 12500"/>
-            </a:avLst>
-          </a:prstGeom>
-          <a:solidFill>
-            <a:srgbClr val="6934B1"/>
-          </a:solidFill>
-          <a:ln/>
-        </p:spPr>
-        <p:txBody>
-          <a:bodyPr/>
-          <a:lstStyle/>
-          <a:p>
-            <a:endParaRPr lang="en-US"/>
-          </a:p>
-        </p:txBody>
-      </p:sp>
-      <p:sp>
-        <p:nvSpPr>
-          <p:cNvPr id="25" name="Text 23"/>
-          <p:cNvSpPr/>
-          <p:nvPr/>
-        </p:nvSpPr>
-        <p:spPr>
-          <a:xfrm>
-            <a:off x="1005840" y="5577840"/>
-            <a:ext cx="10149840" cy="658368"/>
-          </a:xfrm>
-          <a:prstGeom prst="rect">
-            <a:avLst/>
-          </a:prstGeom>
-          <a:noFill/>
-          <a:ln/>
-        </p:spPr>
-        <p:txBody>
-          <a:bodyPr wrap="square" lIns="0" tIns="0" rIns="0" bIns="0" rtlCol="0" anchor="ctr"/>
-          <a:lstStyle/>
-          <a:p>
-            <a:pPr marL="0" indent="0">
-              <a:buNone/>
-            </a:pPr>
-            <a:r>
-              <a:rPr lang="en-US" sz="1550" b="1" dirty="0">
-                <a:solidFill>
-                  <a:srgbClr val="F2EBFC"/>
-                </a:solidFill>
-                <a:latin typeface="Calibri" pitchFamily="34" charset="0"/>
-                <a:ea typeface="Calibri" pitchFamily="34" charset="-122"/>
-                <a:cs typeface="Calibri" pitchFamily="34" charset="-120"/>
-              </a:rPr>
-              <a:t>When in doubt, ask IT before you install, not after. They would much rather have the conversation early.</a:t>
-            </a:r>
-            <a:endParaRPr lang="en-US" sz="1550" dirty="0"/>
-          </a:p>
-        </p:txBody>
-      </p:sp>
-    </p:spTree>
-  </p:cSld>
-  <p:clrMapOvr>
-    <a:masterClrMapping/>
-  </p:clrMapOvr>
-</p:sld>
-</file>
-
-<file path=ppt/slides/slide26.xml><?xml version="1.0" encoding="utf-8"?>
-<p:sld xmlns:a="http://schemas.openxmlformats.org/drawingml/2006/main" xmlns:r="http://schemas.openxmlformats.org/officeDocument/2006/relationships" xmlns:p="http://schemas.openxmlformats.org/presentationml/2006/main">
   <p:cSld name="Slide 26">
     <p:bg>
       <p:bgPr>
@@ -19121,7 +18169,7 @@
 </p:sld>
 </file>
 
-<file path=ppt/slides/slide27.xml><?xml version="1.0" encoding="utf-8"?>
+<file path=ppt/slides/slide26.xml><?xml version="1.0" encoding="utf-8"?>
 <p:sld xmlns:a="http://schemas.openxmlformats.org/drawingml/2006/main" xmlns:r="http://schemas.openxmlformats.org/officeDocument/2006/relationships" xmlns:p="http://schemas.openxmlformats.org/presentationml/2006/main">
   <p:cSld name="Slide 27">
     <p:bg>

--- a/LLMs-101-v2.pptx
+++ b/LLMs-101-v2.pptx
@@ -10226,7 +10226,29 @@
                 <a:ea typeface="Courier New" pitchFamily="34" charset="-122"/>
                 <a:cs typeface="Courier New" pitchFamily="34" charset="-120"/>
               </a:rPr>
-              <a:t>~/.pi/agent/models.json</a:t>
+              <a:t>cp llms-101/</a:t>
+            </a:r>
+            <a:r>
+              <a:rPr lang="en-US" sz="1300" dirty="0" err="1">
+                <a:solidFill>
+                  <a:srgbClr val="5DD9C1"/>
+                </a:solidFill>
+                <a:latin typeface="Courier New" pitchFamily="34" charset="0"/>
+                <a:ea typeface="Courier New" pitchFamily="34" charset="-122"/>
+                <a:cs typeface="Courier New" pitchFamily="34" charset="-120"/>
+              </a:rPr>
+              <a:t>models.json</a:t>
+            </a:r>
+            <a:r>
+              <a:rPr lang="en-US" sz="1300" dirty="0">
+                <a:solidFill>
+                  <a:srgbClr val="5DD9C1"/>
+                </a:solidFill>
+                <a:latin typeface="Courier New" pitchFamily="34" charset="0"/>
+                <a:ea typeface="Courier New" pitchFamily="34" charset="-122"/>
+                <a:cs typeface="Courier New" pitchFamily="34" charset="-120"/>
+              </a:rPr>
+              <a:t> ~/.pi/agent/models.json</a:t>
             </a:r>
             <a:endParaRPr lang="en-US" sz="1300" dirty="0"/>
           </a:p>
@@ -11876,7 +11898,7 @@
                 <a:ea typeface="Calibri" pitchFamily="34" charset="-122"/>
                 <a:cs typeface="Calibri" pitchFamily="34" charset="-120"/>
               </a:rPr>
-              <a:t>In pairs, one laptop. Get the repo, install Pi, add models.json and your API key, pick a model with /model. Hand up the moment anything errors.</a:t>
+              <a:t>Get the repo, install Pi, add models.json and your API key, pick a model with /model. Hand up the moment anything errors.</a:t>
             </a:r>
             <a:endParaRPr lang="en-US" sz="1400" dirty="0"/>
           </a:p>

--- a/LLMs-101-v2.pptx
+++ b/LLMs-101-v2.pptx
@@ -3029,7 +3029,7 @@
                 <a:ea typeface="Calibri" pitchFamily="34" charset="-122"/>
                 <a:cs typeface="Calibri" pitchFamily="34" charset="-120"/>
               </a:rPr>
-              <a:t>How these things actually work, what they cost to run, and how to use them without getting burned.</a:t>
+              <a:t>Chatting to Agents and the Engine Under the Hood</a:t>
             </a:r>
             <a:endParaRPr lang="en-US" sz="2100" dirty="0"/>
           </a:p>
@@ -3134,7 +3134,7 @@
                 <a:ea typeface="Calibri" pitchFamily="34" charset="-122"/>
                 <a:cs typeface="Calibri" pitchFamily="34" charset="-120"/>
               </a:rPr>
-              <a:t>Sawyer Borror  ·  Library IT  ·  Hale Library, AI Studio</a:t>
+              <a:t>Sawyer Borror|sawyerb@ksu.edu  ·  Library IT  ·  Hale Library, Sunderland AI Studio</a:t>
             </a:r>
             <a:endParaRPr lang="en-US" sz="1400" dirty="0"/>
           </a:p>
@@ -5976,7 +5976,7 @@
                 <a:ea typeface="Calibri" pitchFamily="34" charset="-122"/>
                 <a:cs typeface="Calibri" pitchFamily="34" charset="-120"/>
               </a:rPr>
-              <a:t>Approved for sensitive data</a:t>
+              <a:t>Safe for sensitive data</a:t>
             </a:r>
             <a:endParaRPr lang="en-US" sz="1300" dirty="0"/>
           </a:p>
@@ -5997,7 +5997,7 @@
                 <a:ea typeface="Calibri" pitchFamily="34" charset="-122"/>
                 <a:cs typeface="Calibri" pitchFamily="34" charset="-120"/>
               </a:rPr>
-              <a:t>Patron and reference data</a:t>
+              <a:t>More complex or demanding tasks</a:t>
             </a:r>
             <a:endParaRPr lang="en-US" sz="1300" dirty="0"/>
           </a:p>
@@ -6018,7 +6018,7 @@
                 <a:ea typeface="Calibri" pitchFamily="34" charset="-122"/>
                 <a:cs typeface="Calibri" pitchFamily="34" charset="-120"/>
               </a:rPr>
-              <a:t>ILL notes, student work</a:t>
+              <a:t>Exploring new models safely</a:t>
             </a:r>
             <a:endParaRPr lang="en-US" sz="1300" dirty="0"/>
           </a:p>
@@ -10576,7 +10576,7 @@
                 <a:ea typeface="Calibri" pitchFamily="34" charset="-122"/>
                 <a:cs typeface="Calibri" pitchFamily="34" charset="-120"/>
               </a:rPr>
-              <a:t>Hold that thought — it's the first case study in section 4. (This one was cleared with campus IT.)</a:t>
+              <a:t>Hold that thought — it's the first case study in section 4.</a:t>
             </a:r>
             <a:endParaRPr lang="en-US" sz="1400" dirty="0"/>
           </a:p>
@@ -10711,7 +10711,7 @@
                 <a:ea typeface="Cambria" pitchFamily="34" charset="-122"/>
                 <a:cs typeface="Cambria" pitchFamily="34" charset="-120"/>
               </a:rPr>
-              <a:t>What a harness is actually good for in a library</a:t>
+              <a:t>What a harness is actually good for</a:t>
             </a:r>
             <a:endParaRPr lang="en-US" sz="3000" dirty="0"/>
           </a:p>
@@ -18934,7 +18934,7 @@
                 <a:ea typeface="Calibri" pitchFamily="34" charset="-122"/>
                 <a:cs typeface="Calibri" pitchFamily="34" charset="-120"/>
               </a:rPr>
-              <a:t>github.com/sawyerb-ksu/llms-101  ·  pi.dev/docs  ·  ollama.com  ·  and me — bring your repetitive task.</a:t>
+              <a:t>github.com/sawyerb-ksu/llms-101  ·  pi.dev/docs  ·  ollama.com  ·  and me — lets create solutions!</a:t>
             </a:r>
             <a:endParaRPr lang="en-US" sz="1600" dirty="0"/>
           </a:p>
